--- a/assets/powerpoints/module-n2-guichet/A2-treize-ou-trente.pptx
+++ b/assets/powerpoints/module-n2-guichet/A2-treize-ou-trente.pptx
@@ -6910,7 +6910,115 @@
                 </a:solidFill>
                 <a:latin typeface="Verdana"/>
               </a:rPr>
-              <a:t>quator&lt;b&gt;ze&lt;/b&gt; et quar&lt;b&gt;ante&lt;/b&gt; · quin&lt;b&gt;ze&lt;/b&gt; et cinqu&lt;b&gt;ante&lt;/b&gt; · sei&lt;b&gt;ze&lt;/b&gt; et soix&lt;b&gt;ante&lt;/b&gt;. Un mot dont la fin est avalée ne se comprend pas.</a:t>
+              <a:t>quator</a:t>
+            </a:r>
+            <a:r>
+              <a:rPr sz="2000" b="1" i="0">
+                <a:solidFill>
+                  <a:srgbClr val="4B4F52"/>
+                </a:solidFill>
+                <a:latin typeface="Verdana"/>
+              </a:rPr>
+              <a:t>ze</a:t>
+            </a:r>
+            <a:r>
+              <a:rPr sz="2000" b="0" i="0">
+                <a:solidFill>
+                  <a:srgbClr val="4B4F52"/>
+                </a:solidFill>
+                <a:latin typeface="Verdana"/>
+              </a:rPr>
+              <a:t> et quar</a:t>
+            </a:r>
+            <a:r>
+              <a:rPr sz="2000" b="1" i="0">
+                <a:solidFill>
+                  <a:srgbClr val="4B4F52"/>
+                </a:solidFill>
+                <a:latin typeface="Verdana"/>
+              </a:rPr>
+              <a:t>ante</a:t>
+            </a:r>
+            <a:r>
+              <a:rPr sz="2000" b="0" i="0">
+                <a:solidFill>
+                  <a:srgbClr val="4B4F52"/>
+                </a:solidFill>
+                <a:latin typeface="Verdana"/>
+              </a:rPr>
+              <a:t> · quin</a:t>
+            </a:r>
+            <a:r>
+              <a:rPr sz="2000" b="1" i="0">
+                <a:solidFill>
+                  <a:srgbClr val="4B4F52"/>
+                </a:solidFill>
+                <a:latin typeface="Verdana"/>
+              </a:rPr>
+              <a:t>ze</a:t>
+            </a:r>
+            <a:r>
+              <a:rPr sz="2000" b="0" i="0">
+                <a:solidFill>
+                  <a:srgbClr val="4B4F52"/>
+                </a:solidFill>
+                <a:latin typeface="Verdana"/>
+              </a:rPr>
+              <a:t> et cinqu</a:t>
+            </a:r>
+            <a:r>
+              <a:rPr sz="2000" b="1" i="0">
+                <a:solidFill>
+                  <a:srgbClr val="4B4F52"/>
+                </a:solidFill>
+                <a:latin typeface="Verdana"/>
+              </a:rPr>
+              <a:t>ante</a:t>
+            </a:r>
+            <a:r>
+              <a:rPr sz="2000" b="0" i="0">
+                <a:solidFill>
+                  <a:srgbClr val="4B4F52"/>
+                </a:solidFill>
+                <a:latin typeface="Verdana"/>
+              </a:rPr>
+              <a:t> · sei</a:t>
+            </a:r>
+            <a:r>
+              <a:rPr sz="2000" b="1" i="0">
+                <a:solidFill>
+                  <a:srgbClr val="4B4F52"/>
+                </a:solidFill>
+                <a:latin typeface="Verdana"/>
+              </a:rPr>
+              <a:t>ze</a:t>
+            </a:r>
+            <a:r>
+              <a:rPr sz="2000" b="0" i="0">
+                <a:solidFill>
+                  <a:srgbClr val="4B4F52"/>
+                </a:solidFill>
+                <a:latin typeface="Verdana"/>
+              </a:rPr>
+              <a:t> et soix</a:t>
+            </a:r>
+            <a:r>
+              <a:rPr sz="2000" b="1" i="0">
+                <a:solidFill>
+                  <a:srgbClr val="4B4F52"/>
+                </a:solidFill>
+                <a:latin typeface="Verdana"/>
+              </a:rPr>
+              <a:t>ante</a:t>
+            </a:r>
+            <a:r>
+              <a:rPr sz="2000" b="0" i="0">
+                <a:solidFill>
+                  <a:srgbClr val="4B4F52"/>
+                </a:solidFill>
+                <a:latin typeface="Verdana"/>
+              </a:rPr>
+              <a:t>. Un mot dont la fin est avalée ne se comprend pas.</a:t>
             </a:r>
           </a:p>
         </p:txBody>
@@ -8604,7 +8712,43 @@
                 </a:solidFill>
                 <a:latin typeface="Verdana"/>
               </a:rPr>
-              <a:t>« Quarante ? &lt;b&gt;Quatre-zéro&lt;/b&gt; ? » · « Quatorze ? &lt;b&gt;Un-quatre&lt;/b&gt; ? » Personne ne trouve ça bizarre : les gens d'ici le font aussi au téléphone.</a:t>
+              <a:t>« Quarante ? </a:t>
+            </a:r>
+            <a:r>
+              <a:rPr sz="2000" b="1" i="0">
+                <a:solidFill>
+                  <a:srgbClr val="4B4F52"/>
+                </a:solidFill>
+                <a:latin typeface="Verdana"/>
+              </a:rPr>
+              <a:t>Quatre-zéro</a:t>
+            </a:r>
+            <a:r>
+              <a:rPr sz="2000" b="0" i="0">
+                <a:solidFill>
+                  <a:srgbClr val="4B4F52"/>
+                </a:solidFill>
+                <a:latin typeface="Verdana"/>
+              </a:rPr>
+              <a:t> ? » · « Quatorze ? </a:t>
+            </a:r>
+            <a:r>
+              <a:rPr sz="2000" b="1" i="0">
+                <a:solidFill>
+                  <a:srgbClr val="4B4F52"/>
+                </a:solidFill>
+                <a:latin typeface="Verdana"/>
+              </a:rPr>
+              <a:t>Un-quatre</a:t>
+            </a:r>
+            <a:r>
+              <a:rPr sz="2000" b="0" i="0">
+                <a:solidFill>
+                  <a:srgbClr val="4B4F52"/>
+                </a:solidFill>
+                <a:latin typeface="Verdana"/>
+              </a:rPr>
+              <a:t> ? » Personne ne trouve ça bizarre : les gens d'ici le font aussi au téléphone.</a:t>
             </a:r>
           </a:p>
         </p:txBody>
@@ -10080,7 +10224,25 @@
                 </a:solidFill>
                 <a:latin typeface="Verdana"/>
               </a:rPr>
-              <a:t>Avaler la fin du mot rend « quarante » et « quatorze » identiques. La différence est &lt;b&gt;seulement&lt;/b&gt; dans les dernières lettres : il faut les prononcer en entier, même si ça paraît exagéré.</a:t>
+              <a:t>Avaler la fin du mot rend « quarante » et « quatorze » identiques. La différence est </a:t>
+            </a:r>
+            <a:r>
+              <a:rPr sz="2000" b="1" i="0">
+                <a:solidFill>
+                  <a:srgbClr val="4B4F52"/>
+                </a:solidFill>
+                <a:latin typeface="Verdana"/>
+              </a:rPr>
+              <a:t>seulement</a:t>
+            </a:r>
+            <a:r>
+              <a:rPr sz="2000" b="0" i="0">
+                <a:solidFill>
+                  <a:srgbClr val="4B4F52"/>
+                </a:solidFill>
+                <a:latin typeface="Verdana"/>
+              </a:rPr>
+              <a:t> dans les dernières lettres : il faut les prononcer en entier, même si ça paraît exagéré.</a:t>
             </a:r>
           </a:p>
         </p:txBody>
